--- a/template_diagnostic.pptx
+++ b/template_diagnostic.pptx
@@ -4724,6 +4724,14 @@
 <file path=ppt/slides/slide10.xml><?xml version="1.0" encoding="utf-8"?>
 <p:sld xmlns:a="http://schemas.openxmlformats.org/drawingml/2006/main" xmlns:p="http://schemas.openxmlformats.org/presentationml/2006/main" xmlns:r="http://schemas.openxmlformats.org/officeDocument/2006/relationships" xmlns:p14="http://schemas.microsoft.com/office/powerpoint/2010/main" xmlns:p15="http://schemas.microsoft.com/office/powerpoint/2012/main" xmlns:mc="http://schemas.openxmlformats.org/markup-compatibility/2006">
   <p:cSld>
+    <p:bg>
+      <p:bgPr>
+        <a:solidFill>
+          <a:srgbClr val="F2F2F2"/>
+        </a:solidFill>
+        <a:effectLst/>
+      </p:bgPr>
+    </p:bg>
     <p:spTree>
       <p:nvGrpSpPr>
         <p:cNvPr id="1" name=""/>
@@ -4738,30 +4746,99 @@
           <a:chExt cx="0" cy="0"/>
         </a:xfrm>
       </p:grpSpPr>
-      <p:pic>
-        <p:nvPicPr>
-          <p:cNvPr id="62" name="Google Shape;109;p22"/>
-          <p:cNvPicPr/>
+      <p:sp>
+        <p:nvSpPr>
+          <p:cNvPr id="9001" name="Bandeau vert"/>
+          <p:cNvSpPr/>
           <p:nvPr/>
-        </p:nvPicPr>
-        <p:blipFill>
-          <a:blip r:embed="rId1"/>
-          <a:stretch/>
-        </p:blipFill>
-        <p:spPr>
-          <a:xfrm>
-            <a:off x="0" y="0"/>
-            <a:ext cx="9143640" cy="5143320"/>
-          </a:xfrm>
-          <a:prstGeom prst="rect">
-            <a:avLst/>
-          </a:prstGeom>
-          <a:noFill/>
-          <a:ln w="0">
+        </p:nvSpPr>
+        <p:spPr>
+          <a:xfrm>
+            <a:off x="0" y="5019675"/>
+            <a:ext cx="4572000" cy="123825"/>
+          </a:xfrm>
+          <a:prstGeom prst="rect">
+            <a:avLst/>
+          </a:prstGeom>
+          <a:solidFill>
+            <a:srgbClr val="1F5E55"/>
+          </a:solidFill>
+          <a:ln>
             <a:noFill/>
           </a:ln>
         </p:spPr>
-      </p:pic>
+        <p:txBody>
+          <a:bodyPr/>
+          <a:lstStyle/>
+          <a:p>
+            <a:endParaRPr lang="fr-FR"/>
+          </a:p>
+        </p:txBody>
+      </p:sp>
+      <p:sp>
+        <p:nvSpPr>
+          <p:cNvPr id="9002" name="Bandeau rose"/>
+          <p:cNvSpPr/>
+          <p:nvPr/>
+        </p:nvSpPr>
+        <p:spPr>
+          <a:xfrm>
+            <a:off x="4572000" y="5019675"/>
+            <a:ext cx="4572000" cy="123825"/>
+          </a:xfrm>
+          <a:prstGeom prst="rect">
+            <a:avLst/>
+          </a:prstGeom>
+          <a:solidFill>
+            <a:srgbClr val="E94B78"/>
+          </a:solidFill>
+          <a:ln>
+            <a:noFill/>
+          </a:ln>
+        </p:spPr>
+        <p:txBody>
+          <a:bodyPr/>
+          <a:lstStyle/>
+          <a:p>
+            <a:endParaRPr lang="fr-FR"/>
+          </a:p>
+        </p:txBody>
+      </p:sp>
+      <p:sp>
+        <p:nvSpPr>
+          <p:cNvPr id="9003" name="Titre BARLO"/>
+          <p:cNvSpPr txBox="1"/>
+          <p:nvPr/>
+        </p:nvSpPr>
+        <p:spPr>
+          <a:xfrm>
+            <a:off x="304800" y="140000"/>
+            <a:ext cx="8534400" cy="310000"/>
+          </a:xfrm>
+          <a:prstGeom prst="rect">
+            <a:avLst/>
+          </a:prstGeom>
+          <a:noFill/>
+        </p:spPr>
+        <p:txBody>
+          <a:bodyPr wrap="none" lIns="0" tIns="0" rIns="0" bIns="0" anchor="ctr">
+            <a:noAutofit/>
+          </a:bodyPr>
+          <a:lstStyle/>
+          <a:p>
+            <a:r>
+              <a:rPr lang="fr-FR" sz="2000" b="1" dirty="0">
+                <a:solidFill>
+                  <a:srgbClr val="1F5E55"/>
+                </a:solidFill>
+                <a:latin typeface="Century Gothic" panose="020B0502020202020204" pitchFamily="34" charset="0"/>
+                <a:cs typeface="Century Gothic" panose="020B0502020202020204" pitchFamily="34" charset="0"/>
+              </a:rPr>
+              <a:t>SCÉNARIO B — LECTURE FINANCIÈRE ET TECHNIQUE</a:t>
+            </a:r>
+          </a:p>
+        </p:txBody>
+      </p:sp>
       <p:sp>
         <p:nvSpPr>
           <p:cNvPr id="63" name="Google Shape;110;p22"/>
@@ -4911,6 +4988,14 @@
 <file path=ppt/slides/slide11.xml><?xml version="1.0" encoding="utf-8"?>
 <p:sld xmlns:a="http://schemas.openxmlformats.org/drawingml/2006/main" xmlns:p="http://schemas.openxmlformats.org/presentationml/2006/main" xmlns:r="http://schemas.openxmlformats.org/officeDocument/2006/relationships" xmlns:p14="http://schemas.microsoft.com/office/powerpoint/2010/main" xmlns:p15="http://schemas.microsoft.com/office/powerpoint/2012/main" xmlns:mc="http://schemas.openxmlformats.org/markup-compatibility/2006">
   <p:cSld>
+    <p:bg>
+      <p:bgPr>
+        <a:solidFill>
+          <a:srgbClr val="F2F2F2"/>
+        </a:solidFill>
+        <a:effectLst/>
+      </p:bgPr>
+    </p:bg>
     <p:spTree>
       <p:nvGrpSpPr>
         <p:cNvPr id="1" name=""/>
@@ -4925,30 +5010,99 @@
           <a:chExt cx="0" cy="0"/>
         </a:xfrm>
       </p:grpSpPr>
-      <p:pic>
-        <p:nvPicPr>
-          <p:cNvPr id="64" name="Google Shape;115;p23"/>
-          <p:cNvPicPr/>
+      <p:sp>
+        <p:nvSpPr>
+          <p:cNvPr id="9001" name="Bandeau vert"/>
+          <p:cNvSpPr/>
           <p:nvPr/>
-        </p:nvPicPr>
-        <p:blipFill>
-          <a:blip r:embed="rId1"/>
-          <a:stretch/>
-        </p:blipFill>
-        <p:spPr>
-          <a:xfrm>
-            <a:off x="0" y="0"/>
-            <a:ext cx="9143640" cy="5143320"/>
-          </a:xfrm>
-          <a:prstGeom prst="rect">
-            <a:avLst/>
-          </a:prstGeom>
-          <a:noFill/>
-          <a:ln w="0">
+        </p:nvSpPr>
+        <p:spPr>
+          <a:xfrm>
+            <a:off x="0" y="5019675"/>
+            <a:ext cx="4572000" cy="123825"/>
+          </a:xfrm>
+          <a:prstGeom prst="rect">
+            <a:avLst/>
+          </a:prstGeom>
+          <a:solidFill>
+            <a:srgbClr val="1F5E55"/>
+          </a:solidFill>
+          <a:ln>
             <a:noFill/>
           </a:ln>
         </p:spPr>
-      </p:pic>
+        <p:txBody>
+          <a:bodyPr/>
+          <a:lstStyle/>
+          <a:p>
+            <a:endParaRPr lang="fr-FR"/>
+          </a:p>
+        </p:txBody>
+      </p:sp>
+      <p:sp>
+        <p:nvSpPr>
+          <p:cNvPr id="9002" name="Bandeau rose"/>
+          <p:cNvSpPr/>
+          <p:nvPr/>
+        </p:nvSpPr>
+        <p:spPr>
+          <a:xfrm>
+            <a:off x="4572000" y="5019675"/>
+            <a:ext cx="4572000" cy="123825"/>
+          </a:xfrm>
+          <a:prstGeom prst="rect">
+            <a:avLst/>
+          </a:prstGeom>
+          <a:solidFill>
+            <a:srgbClr val="E94B78"/>
+          </a:solidFill>
+          <a:ln>
+            <a:noFill/>
+          </a:ln>
+        </p:spPr>
+        <p:txBody>
+          <a:bodyPr/>
+          <a:lstStyle/>
+          <a:p>
+            <a:endParaRPr lang="fr-FR"/>
+          </a:p>
+        </p:txBody>
+      </p:sp>
+      <p:sp>
+        <p:nvSpPr>
+          <p:cNvPr id="9003" name="Titre BARLO"/>
+          <p:cNvSpPr txBox="1"/>
+          <p:nvPr/>
+        </p:nvSpPr>
+        <p:spPr>
+          <a:xfrm>
+            <a:off x="304800" y="140000"/>
+            <a:ext cx="8534400" cy="310000"/>
+          </a:xfrm>
+          <a:prstGeom prst="rect">
+            <a:avLst/>
+          </a:prstGeom>
+          <a:noFill/>
+        </p:spPr>
+        <p:txBody>
+          <a:bodyPr wrap="none" lIns="0" tIns="0" rIns="0" bIns="0" anchor="ctr">
+            <a:noAutofit/>
+          </a:bodyPr>
+          <a:lstStyle/>
+          <a:p>
+            <a:r>
+              <a:rPr lang="fr-FR" sz="2000" b="1" dirty="0">
+                <a:solidFill>
+                  <a:srgbClr val="1F5E55"/>
+                </a:solidFill>
+                <a:latin typeface="Century Gothic" panose="020B0502020202020204" pitchFamily="34" charset="0"/>
+                <a:cs typeface="Century Gothic" panose="020B0502020202020204" pitchFamily="34" charset="0"/>
+              </a:rPr>
+              <a:t>SCÉNARIO B — EXPOSITION ET FRAGILITÉS</a:t>
+            </a:r>
+          </a:p>
+        </p:txBody>
+      </p:sp>
       <p:sp>
         <p:nvSpPr>
           <p:cNvPr id="65" name="Google Shape;116;p23"/>
@@ -4957,8 +5111,8 @@
         </p:nvSpPr>
         <p:spPr>
           <a:xfrm>
-            <a:off x="0" y="487800"/>
-            <a:ext cx="9143640" cy="2831760"/>
+            <a:off x="0" y="502920"/>
+            <a:ext cx="9144000" cy="2148840"/>
           </a:xfrm>
           <a:prstGeom prst="rect">
             <a:avLst/>
@@ -5102,8 +5256,8 @@
         </p:nvSpPr>
         <p:spPr>
           <a:xfrm>
-            <a:off x="117000" y="3345120"/>
-            <a:ext cx="8953200" cy="1663560"/>
+            <a:off x="118872" y="2697480"/>
+            <a:ext cx="8951976" cy="2240280"/>
           </a:xfrm>
           <a:prstGeom prst="rect">
             <a:avLst/>
@@ -5227,10 +5381,10 @@
   <p:cSld>
     <p:bg>
       <p:bgPr>
-        <a:blipFill rotWithShape="0">
-          <a:blip r:embed="rId1"/>
-          <a:stretch/>
-        </a:blipFill>
+        <a:solidFill>
+          <a:srgbClr val="F2F2F2"/>
+        </a:solidFill>
+        <a:effectLst/>
       </p:bgPr>
     </p:bg>
     <p:spTree>
@@ -5249,6 +5403,99 @@
       </p:grpSpPr>
       <p:sp>
         <p:nvSpPr>
+          <p:cNvPr id="9001" name="Bandeau vert"/>
+          <p:cNvSpPr/>
+          <p:nvPr/>
+        </p:nvSpPr>
+        <p:spPr>
+          <a:xfrm>
+            <a:off x="0" y="5019675"/>
+            <a:ext cx="4572000" cy="123825"/>
+          </a:xfrm>
+          <a:prstGeom prst="rect">
+            <a:avLst/>
+          </a:prstGeom>
+          <a:solidFill>
+            <a:srgbClr val="1F5E55"/>
+          </a:solidFill>
+          <a:ln>
+            <a:noFill/>
+          </a:ln>
+        </p:spPr>
+        <p:txBody>
+          <a:bodyPr/>
+          <a:lstStyle/>
+          <a:p>
+            <a:endParaRPr lang="fr-FR"/>
+          </a:p>
+        </p:txBody>
+      </p:sp>
+      <p:sp>
+        <p:nvSpPr>
+          <p:cNvPr id="9002" name="Bandeau rose"/>
+          <p:cNvSpPr/>
+          <p:nvPr/>
+        </p:nvSpPr>
+        <p:spPr>
+          <a:xfrm>
+            <a:off x="4572000" y="5019675"/>
+            <a:ext cx="4572000" cy="123825"/>
+          </a:xfrm>
+          <a:prstGeom prst="rect">
+            <a:avLst/>
+          </a:prstGeom>
+          <a:solidFill>
+            <a:srgbClr val="E94B78"/>
+          </a:solidFill>
+          <a:ln>
+            <a:noFill/>
+          </a:ln>
+        </p:spPr>
+        <p:txBody>
+          <a:bodyPr/>
+          <a:lstStyle/>
+          <a:p>
+            <a:endParaRPr lang="fr-FR"/>
+          </a:p>
+        </p:txBody>
+      </p:sp>
+      <p:sp>
+        <p:nvSpPr>
+          <p:cNvPr id="9003" name="Titre BARLO"/>
+          <p:cNvSpPr txBox="1"/>
+          <p:nvPr/>
+        </p:nvSpPr>
+        <p:spPr>
+          <a:xfrm>
+            <a:off x="304800" y="140000"/>
+            <a:ext cx="8534400" cy="310000"/>
+          </a:xfrm>
+          <a:prstGeom prst="rect">
+            <a:avLst/>
+          </a:prstGeom>
+          <a:noFill/>
+        </p:spPr>
+        <p:txBody>
+          <a:bodyPr wrap="none" lIns="0" tIns="0" rIns="0" bIns="0" anchor="ctr">
+            <a:noAutofit/>
+          </a:bodyPr>
+          <a:lstStyle/>
+          <a:p>
+            <a:r>
+              <a:rPr lang="fr-FR" sz="2000" b="1" dirty="0">
+                <a:solidFill>
+                  <a:srgbClr val="1F5E55"/>
+                </a:solidFill>
+                <a:latin typeface="Century Gothic" panose="020B0502020202020204" pitchFamily="34" charset="0"/>
+                <a:cs typeface="Century Gothic" panose="020B0502020202020204" pitchFamily="34" charset="0"/>
+              </a:rPr>
+              <a:t>SCÉNARIO C — VOLUMÉTRIE</a:t>
+            </a:r>
+          </a:p>
+        </p:txBody>
+      </p:sp>
+      <p:sp>
+        <p:nvSpPr>
           <p:cNvPr id="67" name="Google Shape;122;p24"/>
           <p:cNvSpPr/>
           <p:nvPr/>
@@ -5505,6 +5752,14 @@
 <file path=ppt/slides/slide13.xml><?xml version="1.0" encoding="utf-8"?>
 <p:sld xmlns:a="http://schemas.openxmlformats.org/drawingml/2006/main" xmlns:p="http://schemas.openxmlformats.org/presentationml/2006/main" xmlns:r="http://schemas.openxmlformats.org/officeDocument/2006/relationships" xmlns:p14="http://schemas.microsoft.com/office/powerpoint/2010/main" xmlns:p15="http://schemas.microsoft.com/office/powerpoint/2012/main" xmlns:mc="http://schemas.openxmlformats.org/markup-compatibility/2006">
   <p:cSld>
+    <p:bg>
+      <p:bgPr>
+        <a:solidFill>
+          <a:srgbClr val="F2F2F2"/>
+        </a:solidFill>
+        <a:effectLst/>
+      </p:bgPr>
+    </p:bg>
     <p:spTree>
       <p:nvGrpSpPr>
         <p:cNvPr id="1" name=""/>
@@ -5519,30 +5774,99 @@
           <a:chExt cx="0" cy="0"/>
         </a:xfrm>
       </p:grpSpPr>
-      <p:pic>
-        <p:nvPicPr>
-          <p:cNvPr id="69" name="Google Shape;128;p25"/>
-          <p:cNvPicPr/>
+      <p:sp>
+        <p:nvSpPr>
+          <p:cNvPr id="9001" name="Bandeau vert"/>
+          <p:cNvSpPr/>
           <p:nvPr/>
-        </p:nvPicPr>
-        <p:blipFill>
-          <a:blip r:embed="rId1"/>
-          <a:stretch/>
-        </p:blipFill>
-        <p:spPr>
-          <a:xfrm>
-            <a:off x="0" y="0"/>
-            <a:ext cx="9143640" cy="5143320"/>
-          </a:xfrm>
-          <a:prstGeom prst="rect">
-            <a:avLst/>
-          </a:prstGeom>
-          <a:noFill/>
-          <a:ln w="0">
+        </p:nvSpPr>
+        <p:spPr>
+          <a:xfrm>
+            <a:off x="0" y="5019675"/>
+            <a:ext cx="4572000" cy="123825"/>
+          </a:xfrm>
+          <a:prstGeom prst="rect">
+            <a:avLst/>
+          </a:prstGeom>
+          <a:solidFill>
+            <a:srgbClr val="1F5E55"/>
+          </a:solidFill>
+          <a:ln>
             <a:noFill/>
           </a:ln>
         </p:spPr>
-      </p:pic>
+        <p:txBody>
+          <a:bodyPr/>
+          <a:lstStyle/>
+          <a:p>
+            <a:endParaRPr lang="fr-FR"/>
+          </a:p>
+        </p:txBody>
+      </p:sp>
+      <p:sp>
+        <p:nvSpPr>
+          <p:cNvPr id="9002" name="Bandeau rose"/>
+          <p:cNvSpPr/>
+          <p:nvPr/>
+        </p:nvSpPr>
+        <p:spPr>
+          <a:xfrm>
+            <a:off x="4572000" y="5019675"/>
+            <a:ext cx="4572000" cy="123825"/>
+          </a:xfrm>
+          <a:prstGeom prst="rect">
+            <a:avLst/>
+          </a:prstGeom>
+          <a:solidFill>
+            <a:srgbClr val="E94B78"/>
+          </a:solidFill>
+          <a:ln>
+            <a:noFill/>
+          </a:ln>
+        </p:spPr>
+        <p:txBody>
+          <a:bodyPr/>
+          <a:lstStyle/>
+          <a:p>
+            <a:endParaRPr lang="fr-FR"/>
+          </a:p>
+        </p:txBody>
+      </p:sp>
+      <p:sp>
+        <p:nvSpPr>
+          <p:cNvPr id="9003" name="Titre BARLO"/>
+          <p:cNvSpPr txBox="1"/>
+          <p:nvPr/>
+        </p:nvSpPr>
+        <p:spPr>
+          <a:xfrm>
+            <a:off x="304800" y="140000"/>
+            <a:ext cx="8534400" cy="310000"/>
+          </a:xfrm>
+          <a:prstGeom prst="rect">
+            <a:avLst/>
+          </a:prstGeom>
+          <a:noFill/>
+        </p:spPr>
+        <p:txBody>
+          <a:bodyPr wrap="none" lIns="0" tIns="0" rIns="0" bIns="0" anchor="ctr">
+            <a:noAutofit/>
+          </a:bodyPr>
+          <a:lstStyle/>
+          <a:p>
+            <a:r>
+              <a:rPr lang="fr-FR" sz="2000" b="1" dirty="0">
+                <a:solidFill>
+                  <a:srgbClr val="1F5E55"/>
+                </a:solidFill>
+                <a:latin typeface="Century Gothic" panose="020B0502020202020204" pitchFamily="34" charset="0"/>
+                <a:cs typeface="Century Gothic" panose="020B0502020202020204" pitchFamily="34" charset="0"/>
+              </a:rPr>
+              <a:t>SCÉNARIO C — LECTURE FINANCIÈRE ET TECHNIQUE</a:t>
+            </a:r>
+          </a:p>
+        </p:txBody>
+      </p:sp>
       <p:sp>
         <p:nvSpPr>
           <p:cNvPr id="70" name="Google Shape;129;p25"/>
@@ -5692,6 +6016,14 @@
 <file path=ppt/slides/slide14.xml><?xml version="1.0" encoding="utf-8"?>
 <p:sld xmlns:a="http://schemas.openxmlformats.org/drawingml/2006/main" xmlns:p="http://schemas.openxmlformats.org/presentationml/2006/main" xmlns:r="http://schemas.openxmlformats.org/officeDocument/2006/relationships" xmlns:p14="http://schemas.microsoft.com/office/powerpoint/2010/main" xmlns:p15="http://schemas.microsoft.com/office/powerpoint/2012/main" xmlns:mc="http://schemas.openxmlformats.org/markup-compatibility/2006">
   <p:cSld>
+    <p:bg>
+      <p:bgPr>
+        <a:solidFill>
+          <a:srgbClr val="F2F2F2"/>
+        </a:solidFill>
+        <a:effectLst/>
+      </p:bgPr>
+    </p:bg>
     <p:spTree>
       <p:nvGrpSpPr>
         <p:cNvPr id="1" name=""/>
@@ -5706,30 +6038,99 @@
           <a:chExt cx="0" cy="0"/>
         </a:xfrm>
       </p:grpSpPr>
-      <p:pic>
-        <p:nvPicPr>
-          <p:cNvPr id="71" name="Google Shape;134;p26"/>
-          <p:cNvPicPr/>
+      <p:sp>
+        <p:nvSpPr>
+          <p:cNvPr id="9001" name="Bandeau vert"/>
+          <p:cNvSpPr/>
           <p:nvPr/>
-        </p:nvPicPr>
-        <p:blipFill>
-          <a:blip r:embed="rId1"/>
-          <a:stretch/>
-        </p:blipFill>
-        <p:spPr>
-          <a:xfrm>
-            <a:off x="0" y="0"/>
-            <a:ext cx="9143640" cy="5143320"/>
-          </a:xfrm>
-          <a:prstGeom prst="rect">
-            <a:avLst/>
-          </a:prstGeom>
-          <a:noFill/>
-          <a:ln w="0">
+        </p:nvSpPr>
+        <p:spPr>
+          <a:xfrm>
+            <a:off x="0" y="5019675"/>
+            <a:ext cx="4572000" cy="123825"/>
+          </a:xfrm>
+          <a:prstGeom prst="rect">
+            <a:avLst/>
+          </a:prstGeom>
+          <a:solidFill>
+            <a:srgbClr val="1F5E55"/>
+          </a:solidFill>
+          <a:ln>
             <a:noFill/>
           </a:ln>
         </p:spPr>
-      </p:pic>
+        <p:txBody>
+          <a:bodyPr/>
+          <a:lstStyle/>
+          <a:p>
+            <a:endParaRPr lang="fr-FR"/>
+          </a:p>
+        </p:txBody>
+      </p:sp>
+      <p:sp>
+        <p:nvSpPr>
+          <p:cNvPr id="9002" name="Bandeau rose"/>
+          <p:cNvSpPr/>
+          <p:nvPr/>
+        </p:nvSpPr>
+        <p:spPr>
+          <a:xfrm>
+            <a:off x="4572000" y="5019675"/>
+            <a:ext cx="4572000" cy="123825"/>
+          </a:xfrm>
+          <a:prstGeom prst="rect">
+            <a:avLst/>
+          </a:prstGeom>
+          <a:solidFill>
+            <a:srgbClr val="E94B78"/>
+          </a:solidFill>
+          <a:ln>
+            <a:noFill/>
+          </a:ln>
+        </p:spPr>
+        <p:txBody>
+          <a:bodyPr/>
+          <a:lstStyle/>
+          <a:p>
+            <a:endParaRPr lang="fr-FR"/>
+          </a:p>
+        </p:txBody>
+      </p:sp>
+      <p:sp>
+        <p:nvSpPr>
+          <p:cNvPr id="9003" name="Titre BARLO"/>
+          <p:cNvSpPr txBox="1"/>
+          <p:nvPr/>
+        </p:nvSpPr>
+        <p:spPr>
+          <a:xfrm>
+            <a:off x="304800" y="140000"/>
+            <a:ext cx="8534400" cy="310000"/>
+          </a:xfrm>
+          <a:prstGeom prst="rect">
+            <a:avLst/>
+          </a:prstGeom>
+          <a:noFill/>
+        </p:spPr>
+        <p:txBody>
+          <a:bodyPr wrap="none" lIns="0" tIns="0" rIns="0" bIns="0" anchor="ctr">
+            <a:noAutofit/>
+          </a:bodyPr>
+          <a:lstStyle/>
+          <a:p>
+            <a:r>
+              <a:rPr lang="fr-FR" sz="2000" b="1" dirty="0">
+                <a:solidFill>
+                  <a:srgbClr val="1F5E55"/>
+                </a:solidFill>
+                <a:latin typeface="Century Gothic" panose="020B0502020202020204" pitchFamily="34" charset="0"/>
+                <a:cs typeface="Century Gothic" panose="020B0502020202020204" pitchFamily="34" charset="0"/>
+              </a:rPr>
+              <a:t>SCÉNARIO C — EXPOSITION ET FRAGILITÉS</a:t>
+            </a:r>
+          </a:p>
+        </p:txBody>
+      </p:sp>
       <p:sp>
         <p:nvSpPr>
           <p:cNvPr id="72" name="Google Shape;135;p26"/>
@@ -5738,8 +6139,8 @@
         </p:nvSpPr>
         <p:spPr>
           <a:xfrm>
-            <a:off x="0" y="487800"/>
-            <a:ext cx="9143640" cy="2831760"/>
+            <a:off x="0" y="502920"/>
+            <a:ext cx="9144000" cy="2148840"/>
           </a:xfrm>
           <a:prstGeom prst="rect">
             <a:avLst/>
@@ -5913,8 +6314,8 @@
         </p:nvSpPr>
         <p:spPr>
           <a:xfrm>
-            <a:off x="117000" y="3345120"/>
-            <a:ext cx="8953200" cy="1663560"/>
+            <a:off x="118872" y="2697480"/>
+            <a:ext cx="8951976" cy="2240280"/>
           </a:xfrm>
           <a:prstGeom prst="rect">
             <a:avLst/>
@@ -6002,10 +6403,10 @@
   <p:cSld>
     <p:bg>
       <p:bgPr>
-        <a:blipFill rotWithShape="0">
-          <a:blip r:embed="rId1"/>
-          <a:stretch/>
-        </a:blipFill>
+        <a:solidFill>
+          <a:srgbClr val="F2F2F2"/>
+        </a:solidFill>
+        <a:effectLst/>
       </p:bgPr>
     </p:bg>
     <p:spTree>
@@ -6024,6 +6425,99 @@
       </p:grpSpPr>
       <p:sp>
         <p:nvSpPr>
+          <p:cNvPr id="9001" name="Bandeau vert"/>
+          <p:cNvSpPr/>
+          <p:nvPr/>
+        </p:nvSpPr>
+        <p:spPr>
+          <a:xfrm>
+            <a:off x="0" y="5019675"/>
+            <a:ext cx="4572000" cy="123825"/>
+          </a:xfrm>
+          <a:prstGeom prst="rect">
+            <a:avLst/>
+          </a:prstGeom>
+          <a:solidFill>
+            <a:srgbClr val="1F5E55"/>
+          </a:solidFill>
+          <a:ln>
+            <a:noFill/>
+          </a:ln>
+        </p:spPr>
+        <p:txBody>
+          <a:bodyPr/>
+          <a:lstStyle/>
+          <a:p>
+            <a:endParaRPr lang="fr-FR"/>
+          </a:p>
+        </p:txBody>
+      </p:sp>
+      <p:sp>
+        <p:nvSpPr>
+          <p:cNvPr id="9002" name="Bandeau rose"/>
+          <p:cNvSpPr/>
+          <p:nvPr/>
+        </p:nvSpPr>
+        <p:spPr>
+          <a:xfrm>
+            <a:off x="4572000" y="5019675"/>
+            <a:ext cx="4572000" cy="123825"/>
+          </a:xfrm>
+          <a:prstGeom prst="rect">
+            <a:avLst/>
+          </a:prstGeom>
+          <a:solidFill>
+            <a:srgbClr val="E94B78"/>
+          </a:solidFill>
+          <a:ln>
+            <a:noFill/>
+          </a:ln>
+        </p:spPr>
+        <p:txBody>
+          <a:bodyPr/>
+          <a:lstStyle/>
+          <a:p>
+            <a:endParaRPr lang="fr-FR"/>
+          </a:p>
+        </p:txBody>
+      </p:sp>
+      <p:sp>
+        <p:nvSpPr>
+          <p:cNvPr id="9003" name="Titre BARLO"/>
+          <p:cNvSpPr txBox="1"/>
+          <p:nvPr/>
+        </p:nvSpPr>
+        <p:spPr>
+          <a:xfrm>
+            <a:off x="304800" y="140000"/>
+            <a:ext cx="8534400" cy="310000"/>
+          </a:xfrm>
+          <a:prstGeom prst="rect">
+            <a:avLst/>
+          </a:prstGeom>
+          <a:noFill/>
+        </p:spPr>
+        <p:txBody>
+          <a:bodyPr wrap="none" lIns="0" tIns="0" rIns="0" bIns="0" anchor="ctr">
+            <a:noAutofit/>
+          </a:bodyPr>
+          <a:lstStyle/>
+          <a:p>
+            <a:r>
+              <a:rPr lang="fr-FR" sz="2000" b="1" dirty="0">
+                <a:solidFill>
+                  <a:srgbClr val="1F5E55"/>
+                </a:solidFill>
+                <a:latin typeface="Century Gothic" panose="020B0502020202020204" pitchFamily="34" charset="0"/>
+                <a:cs typeface="Century Gothic" panose="020B0502020202020204" pitchFamily="34" charset="0"/>
+              </a:rPr>
+              <a:t>COMPARATIF STRATÉGIQUE GLOBAL</a:t>
+            </a:r>
+          </a:p>
+        </p:txBody>
+      </p:sp>
+      <p:sp>
+        <p:nvSpPr>
           <p:cNvPr id="74" name="Google Shape;141;p27"/>
           <p:cNvSpPr/>
           <p:nvPr/>
@@ -6613,6 +7107,14 @@
 <file path=ppt/slides/slide16.xml><?xml version="1.0" encoding="utf-8"?>
 <p:sld xmlns:a="http://schemas.openxmlformats.org/drawingml/2006/main" xmlns:p="http://schemas.openxmlformats.org/presentationml/2006/main" xmlns:r="http://schemas.openxmlformats.org/officeDocument/2006/relationships" xmlns:p14="http://schemas.microsoft.com/office/powerpoint/2010/main" xmlns:p15="http://schemas.microsoft.com/office/powerpoint/2012/main" xmlns:mc="http://schemas.openxmlformats.org/markup-compatibility/2006">
   <p:cSld>
+    <p:bg>
+      <p:bgPr>
+        <a:solidFill>
+          <a:srgbClr val="F2F2F2"/>
+        </a:solidFill>
+        <a:effectLst/>
+      </p:bgPr>
+    </p:bg>
     <p:spTree>
       <p:nvGrpSpPr>
         <p:cNvPr id="1" name=""/>
@@ -6627,30 +7129,99 @@
           <a:chExt cx="0" cy="0"/>
         </a:xfrm>
       </p:grpSpPr>
-      <p:pic>
-        <p:nvPicPr>
-          <p:cNvPr id="83" name="Google Shape;158;p28"/>
-          <p:cNvPicPr/>
+      <p:sp>
+        <p:nvSpPr>
+          <p:cNvPr id="9001" name="Bandeau vert"/>
+          <p:cNvSpPr/>
           <p:nvPr/>
-        </p:nvPicPr>
-        <p:blipFill>
-          <a:blip r:embed="rId1"/>
-          <a:stretch/>
-        </p:blipFill>
-        <p:spPr>
-          <a:xfrm>
-            <a:off x="0" y="0"/>
-            <a:ext cx="9143640" cy="5143320"/>
-          </a:xfrm>
-          <a:prstGeom prst="rect">
-            <a:avLst/>
-          </a:prstGeom>
-          <a:noFill/>
-          <a:ln w="0">
+        </p:nvSpPr>
+        <p:spPr>
+          <a:xfrm>
+            <a:off x="0" y="5019675"/>
+            <a:ext cx="4572000" cy="123825"/>
+          </a:xfrm>
+          <a:prstGeom prst="rect">
+            <a:avLst/>
+          </a:prstGeom>
+          <a:solidFill>
+            <a:srgbClr val="1F5E55"/>
+          </a:solidFill>
+          <a:ln>
             <a:noFill/>
           </a:ln>
         </p:spPr>
-      </p:pic>
+        <p:txBody>
+          <a:bodyPr/>
+          <a:lstStyle/>
+          <a:p>
+            <a:endParaRPr lang="fr-FR"/>
+          </a:p>
+        </p:txBody>
+      </p:sp>
+      <p:sp>
+        <p:nvSpPr>
+          <p:cNvPr id="9002" name="Bandeau rose"/>
+          <p:cNvSpPr/>
+          <p:nvPr/>
+        </p:nvSpPr>
+        <p:spPr>
+          <a:xfrm>
+            <a:off x="4572000" y="5019675"/>
+            <a:ext cx="4572000" cy="123825"/>
+          </a:xfrm>
+          <a:prstGeom prst="rect">
+            <a:avLst/>
+          </a:prstGeom>
+          <a:solidFill>
+            <a:srgbClr val="E94B78"/>
+          </a:solidFill>
+          <a:ln>
+            <a:noFill/>
+          </a:ln>
+        </p:spPr>
+        <p:txBody>
+          <a:bodyPr/>
+          <a:lstStyle/>
+          <a:p>
+            <a:endParaRPr lang="fr-FR"/>
+          </a:p>
+        </p:txBody>
+      </p:sp>
+      <p:sp>
+        <p:nvSpPr>
+          <p:cNvPr id="9003" name="Titre BARLO"/>
+          <p:cNvSpPr txBox="1"/>
+          <p:nvPr/>
+        </p:nvSpPr>
+        <p:spPr>
+          <a:xfrm>
+            <a:off x="304800" y="140000"/>
+            <a:ext cx="8534400" cy="310000"/>
+          </a:xfrm>
+          <a:prstGeom prst="rect">
+            <a:avLst/>
+          </a:prstGeom>
+          <a:noFill/>
+        </p:spPr>
+        <p:txBody>
+          <a:bodyPr wrap="none" lIns="0" tIns="0" rIns="0" bIns="0" anchor="ctr">
+            <a:noAutofit/>
+          </a:bodyPr>
+          <a:lstStyle/>
+          <a:p>
+            <a:r>
+              <a:rPr lang="fr-FR" sz="2000" b="1" dirty="0">
+                <a:solidFill>
+                  <a:srgbClr val="1F5E55"/>
+                </a:solidFill>
+                <a:latin typeface="Century Gothic" panose="020B0502020202020204" pitchFamily="34" charset="0"/>
+                <a:cs typeface="Century Gothic" panose="020B0502020202020204" pitchFamily="34" charset="0"/>
+              </a:rPr>
+              <a:t>ARBITRAGE STRATÉGIQUE</a:t>
+            </a:r>
+          </a:p>
+        </p:txBody>
+      </p:sp>
       <p:sp>
         <p:nvSpPr>
           <p:cNvPr id="84" name="Google Shape;159;p28"/>
@@ -6659,8 +7230,8 @@
         </p:nvSpPr>
         <p:spPr>
           <a:xfrm>
-            <a:off x="127800" y="540000"/>
-            <a:ext cx="9052200" cy="1620000"/>
+            <a:off x="128016" y="539496"/>
+            <a:ext cx="9052560" cy="1874520"/>
           </a:xfrm>
           <a:prstGeom prst="rect">
             <a:avLst/>
@@ -6792,8 +7363,8 @@
         </p:nvSpPr>
         <p:spPr>
           <a:xfrm>
-            <a:off x="180000" y="2037600"/>
-            <a:ext cx="8640000" cy="2822400"/>
+            <a:off x="182880" y="2487168"/>
+            <a:ext cx="8641080" cy="2395728"/>
           </a:xfrm>
           <a:prstGeom prst="rect">
             <a:avLst/>
@@ -7007,10 +7578,10 @@
   <p:cSld>
     <p:bg>
       <p:bgPr>
-        <a:blipFill rotWithShape="0">
-          <a:blip r:embed="rId1"/>
-          <a:stretch/>
-        </a:blipFill>
+        <a:solidFill>
+          <a:srgbClr val="F2F2F2"/>
+        </a:solidFill>
+        <a:effectLst/>
       </p:bgPr>
     </p:bg>
     <p:spTree>
@@ -7027,6 +7598,99 @@
           <a:chExt cx="0" cy="0"/>
         </a:xfrm>
       </p:grpSpPr>
+      <p:sp>
+        <p:nvSpPr>
+          <p:cNvPr id="9001" name="Bandeau vert"/>
+          <p:cNvSpPr/>
+          <p:nvPr/>
+        </p:nvSpPr>
+        <p:spPr>
+          <a:xfrm>
+            <a:off x="0" y="5019675"/>
+            <a:ext cx="4572000" cy="123825"/>
+          </a:xfrm>
+          <a:prstGeom prst="rect">
+            <a:avLst/>
+          </a:prstGeom>
+          <a:solidFill>
+            <a:srgbClr val="1F5E55"/>
+          </a:solidFill>
+          <a:ln>
+            <a:noFill/>
+          </a:ln>
+        </p:spPr>
+        <p:txBody>
+          <a:bodyPr/>
+          <a:lstStyle/>
+          <a:p>
+            <a:endParaRPr lang="fr-FR"/>
+          </a:p>
+        </p:txBody>
+      </p:sp>
+      <p:sp>
+        <p:nvSpPr>
+          <p:cNvPr id="9002" name="Bandeau rose"/>
+          <p:cNvSpPr/>
+          <p:nvPr/>
+        </p:nvSpPr>
+        <p:spPr>
+          <a:xfrm>
+            <a:off x="4572000" y="5019675"/>
+            <a:ext cx="4572000" cy="123825"/>
+          </a:xfrm>
+          <a:prstGeom prst="rect">
+            <a:avLst/>
+          </a:prstGeom>
+          <a:solidFill>
+            <a:srgbClr val="E94B78"/>
+          </a:solidFill>
+          <a:ln>
+            <a:noFill/>
+          </a:ln>
+        </p:spPr>
+        <p:txBody>
+          <a:bodyPr/>
+          <a:lstStyle/>
+          <a:p>
+            <a:endParaRPr lang="fr-FR"/>
+          </a:p>
+        </p:txBody>
+      </p:sp>
+      <p:sp>
+        <p:nvSpPr>
+          <p:cNvPr id="9003" name="Titre BARLO"/>
+          <p:cNvSpPr txBox="1"/>
+          <p:nvPr/>
+        </p:nvSpPr>
+        <p:spPr>
+          <a:xfrm>
+            <a:off x="304800" y="140000"/>
+            <a:ext cx="8534400" cy="310000"/>
+          </a:xfrm>
+          <a:prstGeom prst="rect">
+            <a:avLst/>
+          </a:prstGeom>
+          <a:noFill/>
+        </p:spPr>
+        <p:txBody>
+          <a:bodyPr wrap="none" lIns="0" tIns="0" rIns="0" bIns="0" anchor="ctr">
+            <a:noAutofit/>
+          </a:bodyPr>
+          <a:lstStyle/>
+          <a:p>
+            <a:r>
+              <a:rPr lang="fr-FR" sz="2000" b="1" dirty="0">
+                <a:solidFill>
+                  <a:srgbClr val="1F5E55"/>
+                </a:solidFill>
+                <a:latin typeface="Century Gothic" panose="020B0502020202020204" pitchFamily="34" charset="0"/>
+                <a:cs typeface="Century Gothic" panose="020B0502020202020204" pitchFamily="34" charset="0"/>
+              </a:rPr>
+              <a:t>CONDITIONS DE RÉUSSITE</a:t>
+            </a:r>
+          </a:p>
+        </p:txBody>
+      </p:sp>
       <p:sp>
         <p:nvSpPr>
           <p:cNvPr id="86" name="Google Shape;165;p29"/>
@@ -7595,10 +8259,10 @@
   <p:cSld>
     <p:bg>
       <p:bgPr>
-        <a:blipFill rotWithShape="0">
-          <a:blip r:embed="rId1"/>
-          <a:stretch/>
-        </a:blipFill>
+        <a:solidFill>
+          <a:srgbClr val="F2F2F2"/>
+        </a:solidFill>
+        <a:effectLst/>
       </p:bgPr>
     </p:bg>
     <p:spTree>
@@ -7615,6 +8279,99 @@
           <a:chExt cx="0" cy="0"/>
         </a:xfrm>
       </p:grpSpPr>
+      <p:sp>
+        <p:nvSpPr>
+          <p:cNvPr id="9001" name="Bandeau vert"/>
+          <p:cNvSpPr/>
+          <p:nvPr/>
+        </p:nvSpPr>
+        <p:spPr>
+          <a:xfrm>
+            <a:off x="0" y="5019675"/>
+            <a:ext cx="4572000" cy="123825"/>
+          </a:xfrm>
+          <a:prstGeom prst="rect">
+            <a:avLst/>
+          </a:prstGeom>
+          <a:solidFill>
+            <a:srgbClr val="1F5E55"/>
+          </a:solidFill>
+          <a:ln>
+            <a:noFill/>
+          </a:ln>
+        </p:spPr>
+        <p:txBody>
+          <a:bodyPr/>
+          <a:lstStyle/>
+          <a:p>
+            <a:endParaRPr lang="fr-FR"/>
+          </a:p>
+        </p:txBody>
+      </p:sp>
+      <p:sp>
+        <p:nvSpPr>
+          <p:cNvPr id="9002" name="Bandeau rose"/>
+          <p:cNvSpPr/>
+          <p:nvPr/>
+        </p:nvSpPr>
+        <p:spPr>
+          <a:xfrm>
+            <a:off x="4572000" y="5019675"/>
+            <a:ext cx="4572000" cy="123825"/>
+          </a:xfrm>
+          <a:prstGeom prst="rect">
+            <a:avLst/>
+          </a:prstGeom>
+          <a:solidFill>
+            <a:srgbClr val="E94B78"/>
+          </a:solidFill>
+          <a:ln>
+            <a:noFill/>
+          </a:ln>
+        </p:spPr>
+        <p:txBody>
+          <a:bodyPr/>
+          <a:lstStyle/>
+          <a:p>
+            <a:endParaRPr lang="fr-FR"/>
+          </a:p>
+        </p:txBody>
+      </p:sp>
+      <p:sp>
+        <p:nvSpPr>
+          <p:cNvPr id="9003" name="Titre BARLO"/>
+          <p:cNvSpPr txBox="1"/>
+          <p:nvPr/>
+        </p:nvSpPr>
+        <p:spPr>
+          <a:xfrm>
+            <a:off x="304800" y="140000"/>
+            <a:ext cx="8534400" cy="310000"/>
+          </a:xfrm>
+          <a:prstGeom prst="rect">
+            <a:avLst/>
+          </a:prstGeom>
+          <a:noFill/>
+        </p:spPr>
+        <p:txBody>
+          <a:bodyPr wrap="none" lIns="0" tIns="0" rIns="0" bIns="0" anchor="ctr">
+            <a:noAutofit/>
+          </a:bodyPr>
+          <a:lstStyle/>
+          <a:p>
+            <a:r>
+              <a:rPr lang="fr-FR" sz="2000" b="1" dirty="0">
+                <a:solidFill>
+                  <a:srgbClr val="1F5E55"/>
+                </a:solidFill>
+                <a:latin typeface="Century Gothic" panose="020B0502020202020204" pitchFamily="34" charset="0"/>
+                <a:cs typeface="Century Gothic" panose="020B0502020202020204" pitchFamily="34" charset="0"/>
+              </a:rPr>
+              <a:t>CE QU'ON NE VOIT PAS ENCORE</a:t>
+            </a:r>
+          </a:p>
+        </p:txBody>
+      </p:sp>
       <p:sp>
         <p:nvSpPr>
           <p:cNvPr id="90" name="Google Shape;173;p30"/>
@@ -8183,10 +8940,10 @@
   <p:cSld>
     <p:bg>
       <p:bgPr>
-        <a:blipFill rotWithShape="0">
-          <a:blip r:embed="rId1"/>
-          <a:stretch/>
-        </a:blipFill>
+        <a:solidFill>
+          <a:srgbClr val="F2F2F2"/>
+        </a:solidFill>
+        <a:effectLst/>
       </p:bgPr>
     </p:bg>
     <p:spTree>
@@ -8203,6 +8960,99 @@
           <a:chExt cx="0" cy="0"/>
         </a:xfrm>
       </p:grpSpPr>
+      <p:sp>
+        <p:nvSpPr>
+          <p:cNvPr id="9001" name="Bandeau vert"/>
+          <p:cNvSpPr/>
+          <p:nvPr/>
+        </p:nvSpPr>
+        <p:spPr>
+          <a:xfrm>
+            <a:off x="0" y="5019675"/>
+            <a:ext cx="4572000" cy="123825"/>
+          </a:xfrm>
+          <a:prstGeom prst="rect">
+            <a:avLst/>
+          </a:prstGeom>
+          <a:solidFill>
+            <a:srgbClr val="1F5E55"/>
+          </a:solidFill>
+          <a:ln>
+            <a:noFill/>
+          </a:ln>
+        </p:spPr>
+        <p:txBody>
+          <a:bodyPr/>
+          <a:lstStyle/>
+          <a:p>
+            <a:endParaRPr lang="fr-FR"/>
+          </a:p>
+        </p:txBody>
+      </p:sp>
+      <p:sp>
+        <p:nvSpPr>
+          <p:cNvPr id="9002" name="Bandeau rose"/>
+          <p:cNvSpPr/>
+          <p:nvPr/>
+        </p:nvSpPr>
+        <p:spPr>
+          <a:xfrm>
+            <a:off x="4572000" y="5019675"/>
+            <a:ext cx="4572000" cy="123825"/>
+          </a:xfrm>
+          <a:prstGeom prst="rect">
+            <a:avLst/>
+          </a:prstGeom>
+          <a:solidFill>
+            <a:srgbClr val="E94B78"/>
+          </a:solidFill>
+          <a:ln>
+            <a:noFill/>
+          </a:ln>
+        </p:spPr>
+        <p:txBody>
+          <a:bodyPr/>
+          <a:lstStyle/>
+          <a:p>
+            <a:endParaRPr lang="fr-FR"/>
+          </a:p>
+        </p:txBody>
+      </p:sp>
+      <p:sp>
+        <p:nvSpPr>
+          <p:cNvPr id="9003" name="Titre BARLO"/>
+          <p:cNvSpPr txBox="1"/>
+          <p:nvPr/>
+        </p:nvSpPr>
+        <p:spPr>
+          <a:xfrm>
+            <a:off x="304800" y="140000"/>
+            <a:ext cx="8534400" cy="310000"/>
+          </a:xfrm>
+          <a:prstGeom prst="rect">
+            <a:avLst/>
+          </a:prstGeom>
+          <a:noFill/>
+        </p:spPr>
+        <p:txBody>
+          <a:bodyPr wrap="none" lIns="0" tIns="0" rIns="0" bIns="0" anchor="ctr">
+            <a:noAutofit/>
+          </a:bodyPr>
+          <a:lstStyle/>
+          <a:p>
+            <a:r>
+              <a:rPr lang="fr-FR" sz="2000" b="1" dirty="0">
+                <a:solidFill>
+                  <a:srgbClr val="1F5E55"/>
+                </a:solidFill>
+                <a:latin typeface="Century Gothic" panose="020B0502020202020204" pitchFamily="34" charset="0"/>
+                <a:cs typeface="Century Gothic" panose="020B0502020202020204" pitchFamily="34" charset="0"/>
+              </a:rPr>
+              <a:t>PROCHAINE ÉTAPE / ÉTUDE DE FAISABILITÉ</a:t>
+            </a:r>
+          </a:p>
+        </p:txBody>
+      </p:sp>
       <p:sp>
         <p:nvSpPr>
           <p:cNvPr id="94" name="Google Shape;181;p31"/>
@@ -8647,6 +9497,14 @@
 <file path=ppt/slides/slide20.xml><?xml version="1.0" encoding="utf-8"?>
 <p:sld xmlns:a="http://schemas.openxmlformats.org/drawingml/2006/main" xmlns:p="http://schemas.openxmlformats.org/presentationml/2006/main" xmlns:r="http://schemas.openxmlformats.org/officeDocument/2006/relationships" xmlns:p14="http://schemas.microsoft.com/office/powerpoint/2010/main" xmlns:p15="http://schemas.microsoft.com/office/powerpoint/2012/main" xmlns:mc="http://schemas.openxmlformats.org/markup-compatibility/2006">
   <p:cSld>
+    <p:bg>
+      <p:bgPr>
+        <a:solidFill>
+          <a:srgbClr val="F2F2F2"/>
+        </a:solidFill>
+        <a:effectLst/>
+      </p:bgPr>
+    </p:bg>
     <p:spTree>
       <p:nvGrpSpPr>
         <p:cNvPr id="1" name=""/>
@@ -8661,30 +9519,99 @@
           <a:chExt cx="0" cy="0"/>
         </a:xfrm>
       </p:grpSpPr>
-      <p:pic>
-        <p:nvPicPr>
-          <p:cNvPr id="96" name="Google Shape;188;p32"/>
-          <p:cNvPicPr/>
+      <p:sp>
+        <p:nvSpPr>
+          <p:cNvPr id="9001" name="Bandeau vert"/>
+          <p:cNvSpPr/>
           <p:nvPr/>
-        </p:nvPicPr>
-        <p:blipFill>
-          <a:blip r:embed="rId1"/>
-          <a:stretch/>
-        </p:blipFill>
-        <p:spPr>
-          <a:xfrm>
-            <a:off x="0" y="0"/>
-            <a:ext cx="9143640" cy="5143320"/>
-          </a:xfrm>
-          <a:prstGeom prst="rect">
-            <a:avLst/>
-          </a:prstGeom>
-          <a:noFill/>
-          <a:ln w="0">
+        </p:nvSpPr>
+        <p:spPr>
+          <a:xfrm>
+            <a:off x="0" y="5019675"/>
+            <a:ext cx="4572000" cy="123825"/>
+          </a:xfrm>
+          <a:prstGeom prst="rect">
+            <a:avLst/>
+          </a:prstGeom>
+          <a:solidFill>
+            <a:srgbClr val="1F5E55"/>
+          </a:solidFill>
+          <a:ln>
             <a:noFill/>
           </a:ln>
         </p:spPr>
-      </p:pic>
+        <p:txBody>
+          <a:bodyPr/>
+          <a:lstStyle/>
+          <a:p>
+            <a:endParaRPr lang="fr-FR"/>
+          </a:p>
+        </p:txBody>
+      </p:sp>
+      <p:sp>
+        <p:nvSpPr>
+          <p:cNvPr id="9002" name="Bandeau rose"/>
+          <p:cNvSpPr/>
+          <p:nvPr/>
+        </p:nvSpPr>
+        <p:spPr>
+          <a:xfrm>
+            <a:off x="4572000" y="5019675"/>
+            <a:ext cx="4572000" cy="123825"/>
+          </a:xfrm>
+          <a:prstGeom prst="rect">
+            <a:avLst/>
+          </a:prstGeom>
+          <a:solidFill>
+            <a:srgbClr val="E94B78"/>
+          </a:solidFill>
+          <a:ln>
+            <a:noFill/>
+          </a:ln>
+        </p:spPr>
+        <p:txBody>
+          <a:bodyPr/>
+          <a:lstStyle/>
+          <a:p>
+            <a:endParaRPr lang="fr-FR"/>
+          </a:p>
+        </p:txBody>
+      </p:sp>
+      <p:sp>
+        <p:nvSpPr>
+          <p:cNvPr id="9003" name="Titre BARLO"/>
+          <p:cNvSpPr txBox="1"/>
+          <p:nvPr/>
+        </p:nvSpPr>
+        <p:spPr>
+          <a:xfrm>
+            <a:off x="304800" y="140000"/>
+            <a:ext cx="8534400" cy="310000"/>
+          </a:xfrm>
+          <a:prstGeom prst="rect">
+            <a:avLst/>
+          </a:prstGeom>
+          <a:noFill/>
+        </p:spPr>
+        <p:txBody>
+          <a:bodyPr wrap="none" lIns="0" tIns="0" rIns="0" bIns="0" anchor="ctr">
+            <a:noAutofit/>
+          </a:bodyPr>
+          <a:lstStyle/>
+          <a:p>
+            <a:r>
+              <a:rPr lang="fr-FR" sz="2000" b="1" dirty="0">
+                <a:solidFill>
+                  <a:srgbClr val="1F5E55"/>
+                </a:solidFill>
+                <a:latin typeface="Century Gothic" panose="020B0502020202020204" pitchFamily="34" charset="0"/>
+                <a:cs typeface="Century Gothic" panose="020B0502020202020204" pitchFamily="34" charset="0"/>
+              </a:rPr>
+              <a:t>CONCLUSION / PROJECTION</a:t>
+            </a:r>
+          </a:p>
+        </p:txBody>
+      </p:sp>
       <p:sp>
         <p:nvSpPr>
           <p:cNvPr id="97" name="Google Shape;189;p32"/>
@@ -8943,6 +9870,14 @@
 <file path=ppt/slides/slide3.xml><?xml version="1.0" encoding="utf-8"?>
 <p:sld xmlns:a="http://schemas.openxmlformats.org/drawingml/2006/main" xmlns:p="http://schemas.openxmlformats.org/presentationml/2006/main" xmlns:r="http://schemas.openxmlformats.org/officeDocument/2006/relationships" xmlns:p14="http://schemas.microsoft.com/office/powerpoint/2010/main" xmlns:p15="http://schemas.microsoft.com/office/powerpoint/2012/main" xmlns:mc="http://schemas.openxmlformats.org/markup-compatibility/2006">
   <p:cSld>
+    <p:bg>
+      <p:bgPr>
+        <a:solidFill>
+          <a:srgbClr val="F2F2F2"/>
+        </a:solidFill>
+        <a:effectLst/>
+      </p:bgPr>
+    </p:bg>
     <p:spTree>
       <p:nvGrpSpPr>
         <p:cNvPr id="1" name=""/>
@@ -8957,30 +9892,99 @@
           <a:chExt cx="0" cy="0"/>
         </a:xfrm>
       </p:grpSpPr>
-      <p:pic>
-        <p:nvPicPr>
-          <p:cNvPr id="46" name="Google Shape;65;p15"/>
-          <p:cNvPicPr/>
+      <p:sp>
+        <p:nvSpPr>
+          <p:cNvPr id="9001" name="Bandeau vert"/>
+          <p:cNvSpPr/>
           <p:nvPr/>
-        </p:nvPicPr>
-        <p:blipFill>
-          <a:blip r:embed="rId1"/>
-          <a:stretch/>
-        </p:blipFill>
-        <p:spPr>
-          <a:xfrm>
-            <a:off x="0" y="0"/>
-            <a:ext cx="9143640" cy="5143320"/>
-          </a:xfrm>
-          <a:prstGeom prst="rect">
-            <a:avLst/>
-          </a:prstGeom>
-          <a:noFill/>
-          <a:ln w="0">
+        </p:nvSpPr>
+        <p:spPr>
+          <a:xfrm>
+            <a:off x="0" y="5019675"/>
+            <a:ext cx="4572000" cy="123825"/>
+          </a:xfrm>
+          <a:prstGeom prst="rect">
+            <a:avLst/>
+          </a:prstGeom>
+          <a:solidFill>
+            <a:srgbClr val="1F5E55"/>
+          </a:solidFill>
+          <a:ln>
             <a:noFill/>
           </a:ln>
         </p:spPr>
-      </p:pic>
+        <p:txBody>
+          <a:bodyPr/>
+          <a:lstStyle/>
+          <a:p>
+            <a:endParaRPr lang="fr-FR"/>
+          </a:p>
+        </p:txBody>
+      </p:sp>
+      <p:sp>
+        <p:nvSpPr>
+          <p:cNvPr id="9002" name="Bandeau rose"/>
+          <p:cNvSpPr/>
+          <p:nvPr/>
+        </p:nvSpPr>
+        <p:spPr>
+          <a:xfrm>
+            <a:off x="4572000" y="5019675"/>
+            <a:ext cx="4572000" cy="123825"/>
+          </a:xfrm>
+          <a:prstGeom prst="rect">
+            <a:avLst/>
+          </a:prstGeom>
+          <a:solidFill>
+            <a:srgbClr val="E94B78"/>
+          </a:solidFill>
+          <a:ln>
+            <a:noFill/>
+          </a:ln>
+        </p:spPr>
+        <p:txBody>
+          <a:bodyPr/>
+          <a:lstStyle/>
+          <a:p>
+            <a:endParaRPr lang="fr-FR"/>
+          </a:p>
+        </p:txBody>
+      </p:sp>
+      <p:sp>
+        <p:nvSpPr>
+          <p:cNvPr id="9003" name="Titre BARLO"/>
+          <p:cNvSpPr txBox="1"/>
+          <p:nvPr/>
+        </p:nvSpPr>
+        <p:spPr>
+          <a:xfrm>
+            <a:off x="304800" y="140000"/>
+            <a:ext cx="8534400" cy="310000"/>
+          </a:xfrm>
+          <a:prstGeom prst="rect">
+            <a:avLst/>
+          </a:prstGeom>
+          <a:noFill/>
+        </p:spPr>
+        <p:txBody>
+          <a:bodyPr wrap="none" lIns="0" tIns="0" rIns="0" bIns="0" anchor="ctr">
+            <a:noAutofit/>
+          </a:bodyPr>
+          <a:lstStyle/>
+          <a:p>
+            <a:r>
+              <a:rPr lang="fr-FR" sz="2000" b="1" dirty="0">
+                <a:solidFill>
+                  <a:srgbClr val="1F5E55"/>
+                </a:solidFill>
+                <a:latin typeface="Century Gothic" panose="020B0502020202020204" pitchFamily="34" charset="0"/>
+                <a:cs typeface="Century Gothic" panose="020B0502020202020204" pitchFamily="34" charset="0"/>
+              </a:rPr>
+              <a:t>CE QUI EST EN JEU</a:t>
+            </a:r>
+          </a:p>
+        </p:txBody>
+      </p:sp>
       <p:sp>
         <p:nvSpPr>
           <p:cNvPr id="47" name="Google Shape;66;p15"/>
@@ -9112,6 +10116,14 @@
 <file path=ppt/slides/slide4.xml><?xml version="1.0" encoding="utf-8"?>
 <p:sld xmlns:a="http://schemas.openxmlformats.org/drawingml/2006/main" xmlns:p="http://schemas.openxmlformats.org/presentationml/2006/main" xmlns:r="http://schemas.openxmlformats.org/officeDocument/2006/relationships" xmlns:p14="http://schemas.microsoft.com/office/powerpoint/2010/main" xmlns:p15="http://schemas.microsoft.com/office/powerpoint/2012/main" xmlns:mc="http://schemas.openxmlformats.org/markup-compatibility/2006">
   <p:cSld>
+    <p:bg>
+      <p:bgPr>
+        <a:solidFill>
+          <a:srgbClr val="F2F2F2"/>
+        </a:solidFill>
+        <a:effectLst/>
+      </p:bgPr>
+    </p:bg>
     <p:spTree>
       <p:nvGrpSpPr>
         <p:cNvPr id="1" name=""/>
@@ -9126,30 +10138,99 @@
           <a:chExt cx="0" cy="0"/>
         </a:xfrm>
       </p:grpSpPr>
-      <p:pic>
-        <p:nvPicPr>
-          <p:cNvPr id="48" name="Google Shape;71;p16"/>
-          <p:cNvPicPr/>
+      <p:sp>
+        <p:nvSpPr>
+          <p:cNvPr id="9001" name="Bandeau vert"/>
+          <p:cNvSpPr/>
           <p:nvPr/>
-        </p:nvPicPr>
-        <p:blipFill>
-          <a:blip r:embed="rId1"/>
-          <a:stretch/>
-        </p:blipFill>
-        <p:spPr>
-          <a:xfrm>
-            <a:off x="0" y="0"/>
-            <a:ext cx="9143640" cy="5143320"/>
-          </a:xfrm>
-          <a:prstGeom prst="rect">
-            <a:avLst/>
-          </a:prstGeom>
-          <a:noFill/>
-          <a:ln w="0">
+        </p:nvSpPr>
+        <p:spPr>
+          <a:xfrm>
+            <a:off x="0" y="5019675"/>
+            <a:ext cx="4572000" cy="123825"/>
+          </a:xfrm>
+          <a:prstGeom prst="rect">
+            <a:avLst/>
+          </a:prstGeom>
+          <a:solidFill>
+            <a:srgbClr val="1F5E55"/>
+          </a:solidFill>
+          <a:ln>
             <a:noFill/>
           </a:ln>
         </p:spPr>
-      </p:pic>
+        <p:txBody>
+          <a:bodyPr/>
+          <a:lstStyle/>
+          <a:p>
+            <a:endParaRPr lang="fr-FR"/>
+          </a:p>
+        </p:txBody>
+      </p:sp>
+      <p:sp>
+        <p:nvSpPr>
+          <p:cNvPr id="9002" name="Bandeau rose"/>
+          <p:cNvSpPr/>
+          <p:nvPr/>
+        </p:nvSpPr>
+        <p:spPr>
+          <a:xfrm>
+            <a:off x="4572000" y="5019675"/>
+            <a:ext cx="4572000" cy="123825"/>
+          </a:xfrm>
+          <a:prstGeom prst="rect">
+            <a:avLst/>
+          </a:prstGeom>
+          <a:solidFill>
+            <a:srgbClr val="E94B78"/>
+          </a:solidFill>
+          <a:ln>
+            <a:noFill/>
+          </a:ln>
+        </p:spPr>
+        <p:txBody>
+          <a:bodyPr/>
+          <a:lstStyle/>
+          <a:p>
+            <a:endParaRPr lang="fr-FR"/>
+          </a:p>
+        </p:txBody>
+      </p:sp>
+      <p:sp>
+        <p:nvSpPr>
+          <p:cNvPr id="9003" name="Titre BARLO"/>
+          <p:cNvSpPr txBox="1"/>
+          <p:nvPr/>
+        </p:nvSpPr>
+        <p:spPr>
+          <a:xfrm>
+            <a:off x="304800" y="140000"/>
+            <a:ext cx="8534400" cy="310000"/>
+          </a:xfrm>
+          <a:prstGeom prst="rect">
+            <a:avLst/>
+          </a:prstGeom>
+          <a:noFill/>
+        </p:spPr>
+        <p:txBody>
+          <a:bodyPr wrap="none" lIns="0" tIns="0" rIns="0" bIns="0" anchor="ctr">
+            <a:noAutofit/>
+          </a:bodyPr>
+          <a:lstStyle/>
+          <a:p>
+            <a:r>
+              <a:rPr lang="fr-FR" sz="2000" b="1" dirty="0">
+                <a:solidFill>
+                  <a:srgbClr val="1F5E55"/>
+                </a:solidFill>
+                <a:latin typeface="Century Gothic" panose="020B0502020202020204" pitchFamily="34" charset="0"/>
+                <a:cs typeface="Century Gothic" panose="020B0502020202020204" pitchFamily="34" charset="0"/>
+              </a:rPr>
+              <a:t>LECTURE STRATÉGIQUE DU TERRAIN</a:t>
+            </a:r>
+          </a:p>
+        </p:txBody>
+      </p:sp>
       <p:sp>
         <p:nvSpPr>
           <p:cNvPr id="49" name="Google Shape;72;p16"/>
@@ -9398,10 +10479,10 @@
   <p:cSld>
     <p:bg>
       <p:bgPr>
-        <a:blipFill rotWithShape="0">
-          <a:blip r:embed="rId1"/>
-          <a:stretch/>
-        </a:blipFill>
+        <a:solidFill>
+          <a:srgbClr val="F2F2F2"/>
+        </a:solidFill>
+        <a:effectLst/>
       </p:bgPr>
     </p:bg>
     <p:spTree>
@@ -9418,6 +10499,99 @@
           <a:chExt cx="0" cy="0"/>
         </a:xfrm>
       </p:grpSpPr>
+      <p:sp>
+        <p:nvSpPr>
+          <p:cNvPr id="9001" name="Bandeau vert"/>
+          <p:cNvSpPr/>
+          <p:nvPr/>
+        </p:nvSpPr>
+        <p:spPr>
+          <a:xfrm>
+            <a:off x="0" y="5019675"/>
+            <a:ext cx="4572000" cy="123825"/>
+          </a:xfrm>
+          <a:prstGeom prst="rect">
+            <a:avLst/>
+          </a:prstGeom>
+          <a:solidFill>
+            <a:srgbClr val="1F5E55"/>
+          </a:solidFill>
+          <a:ln>
+            <a:noFill/>
+          </a:ln>
+        </p:spPr>
+        <p:txBody>
+          <a:bodyPr/>
+          <a:lstStyle/>
+          <a:p>
+            <a:endParaRPr lang="fr-FR"/>
+          </a:p>
+        </p:txBody>
+      </p:sp>
+      <p:sp>
+        <p:nvSpPr>
+          <p:cNvPr id="9002" name="Bandeau rose"/>
+          <p:cNvSpPr/>
+          <p:nvPr/>
+        </p:nvSpPr>
+        <p:spPr>
+          <a:xfrm>
+            <a:off x="4572000" y="5019675"/>
+            <a:ext cx="4572000" cy="123825"/>
+          </a:xfrm>
+          <a:prstGeom prst="rect">
+            <a:avLst/>
+          </a:prstGeom>
+          <a:solidFill>
+            <a:srgbClr val="E94B78"/>
+          </a:solidFill>
+          <a:ln>
+            <a:noFill/>
+          </a:ln>
+        </p:spPr>
+        <p:txBody>
+          <a:bodyPr/>
+          <a:lstStyle/>
+          <a:p>
+            <a:endParaRPr lang="fr-FR"/>
+          </a:p>
+        </p:txBody>
+      </p:sp>
+      <p:sp>
+        <p:nvSpPr>
+          <p:cNvPr id="9003" name="Titre BARLO"/>
+          <p:cNvSpPr txBox="1"/>
+          <p:nvPr/>
+        </p:nvSpPr>
+        <p:spPr>
+          <a:xfrm>
+            <a:off x="304800" y="140000"/>
+            <a:ext cx="8534400" cy="310000"/>
+          </a:xfrm>
+          <a:prstGeom prst="rect">
+            <a:avLst/>
+          </a:prstGeom>
+          <a:noFill/>
+        </p:spPr>
+        <p:txBody>
+          <a:bodyPr wrap="none" lIns="0" tIns="0" rIns="0" bIns="0" anchor="ctr">
+            <a:noAutofit/>
+          </a:bodyPr>
+          <a:lstStyle/>
+          <a:p>
+            <a:r>
+              <a:rPr lang="fr-FR" sz="2000" b="1" dirty="0">
+                <a:solidFill>
+                  <a:srgbClr val="1F5E55"/>
+                </a:solidFill>
+                <a:latin typeface="Century Gothic" panose="020B0502020202020204" pitchFamily="34" charset="0"/>
+                <a:cs typeface="Century Gothic" panose="020B0502020202020204" pitchFamily="34" charset="0"/>
+              </a:rPr>
+              <a:t>CONTRAINTES INVISIBLES</a:t>
+            </a:r>
+          </a:p>
+        </p:txBody>
+      </p:sp>
       <p:sp>
         <p:nvSpPr>
           <p:cNvPr id="51" name="Google Shape;78;p17"/>
@@ -9666,10 +10840,10 @@
   <p:cSld>
     <p:bg>
       <p:bgPr>
-        <a:blipFill rotWithShape="0">
-          <a:blip r:embed="rId1"/>
-          <a:stretch/>
-        </a:blipFill>
+        <a:solidFill>
+          <a:srgbClr val="F2F2F2"/>
+        </a:solidFill>
+        <a:effectLst/>
       </p:bgPr>
     </p:bg>
     <p:spTree>
@@ -9688,6 +10862,99 @@
       </p:grpSpPr>
       <p:sp>
         <p:nvSpPr>
+          <p:cNvPr id="9001" name="Bandeau vert"/>
+          <p:cNvSpPr/>
+          <p:nvPr/>
+        </p:nvSpPr>
+        <p:spPr>
+          <a:xfrm>
+            <a:off x="0" y="5019675"/>
+            <a:ext cx="4572000" cy="123825"/>
+          </a:xfrm>
+          <a:prstGeom prst="rect">
+            <a:avLst/>
+          </a:prstGeom>
+          <a:solidFill>
+            <a:srgbClr val="1F5E55"/>
+          </a:solidFill>
+          <a:ln>
+            <a:noFill/>
+          </a:ln>
+        </p:spPr>
+        <p:txBody>
+          <a:bodyPr/>
+          <a:lstStyle/>
+          <a:p>
+            <a:endParaRPr lang="fr-FR"/>
+          </a:p>
+        </p:txBody>
+      </p:sp>
+      <p:sp>
+        <p:nvSpPr>
+          <p:cNvPr id="9002" name="Bandeau rose"/>
+          <p:cNvSpPr/>
+          <p:nvPr/>
+        </p:nvSpPr>
+        <p:spPr>
+          <a:xfrm>
+            <a:off x="4572000" y="5019675"/>
+            <a:ext cx="4572000" cy="123825"/>
+          </a:xfrm>
+          <a:prstGeom prst="rect">
+            <a:avLst/>
+          </a:prstGeom>
+          <a:solidFill>
+            <a:srgbClr val="E94B78"/>
+          </a:solidFill>
+          <a:ln>
+            <a:noFill/>
+          </a:ln>
+        </p:spPr>
+        <p:txBody>
+          <a:bodyPr/>
+          <a:lstStyle/>
+          <a:p>
+            <a:endParaRPr lang="fr-FR"/>
+          </a:p>
+        </p:txBody>
+      </p:sp>
+      <p:sp>
+        <p:nvSpPr>
+          <p:cNvPr id="9003" name="Titre BARLO"/>
+          <p:cNvSpPr txBox="1"/>
+          <p:nvPr/>
+        </p:nvSpPr>
+        <p:spPr>
+          <a:xfrm>
+            <a:off x="304800" y="140000"/>
+            <a:ext cx="8534400" cy="310000"/>
+          </a:xfrm>
+          <a:prstGeom prst="rect">
+            <a:avLst/>
+          </a:prstGeom>
+          <a:noFill/>
+        </p:spPr>
+        <p:txBody>
+          <a:bodyPr wrap="none" lIns="0" tIns="0" rIns="0" bIns="0" anchor="ctr">
+            <a:noAutofit/>
+          </a:bodyPr>
+          <a:lstStyle/>
+          <a:p>
+            <a:r>
+              <a:rPr lang="fr-FR" sz="2000" b="1" dirty="0">
+                <a:solidFill>
+                  <a:srgbClr val="1F5E55"/>
+                </a:solidFill>
+                <a:latin typeface="Century Gothic" panose="020B0502020202020204" pitchFamily="34" charset="0"/>
+                <a:cs typeface="Century Gothic" panose="020B0502020202020204" pitchFamily="34" charset="0"/>
+              </a:rPr>
+              <a:t>SCÉNARIO A — VOLUMÉTRIE</a:t>
+            </a:r>
+          </a:p>
+        </p:txBody>
+      </p:sp>
+      <p:sp>
+        <p:nvSpPr>
           <p:cNvPr id="53" name="Google Shape;84;p18"/>
           <p:cNvSpPr/>
           <p:nvPr/>
@@ -9914,6 +11181,14 @@
 <file path=ppt/slides/slide7.xml><?xml version="1.0" encoding="utf-8"?>
 <p:sld xmlns:a="http://schemas.openxmlformats.org/drawingml/2006/main" xmlns:p="http://schemas.openxmlformats.org/presentationml/2006/main" xmlns:r="http://schemas.openxmlformats.org/officeDocument/2006/relationships" xmlns:p14="http://schemas.microsoft.com/office/powerpoint/2010/main" xmlns:p15="http://schemas.microsoft.com/office/powerpoint/2012/main" xmlns:mc="http://schemas.openxmlformats.org/markup-compatibility/2006">
   <p:cSld>
+    <p:bg>
+      <p:bgPr>
+        <a:solidFill>
+          <a:srgbClr val="F2F2F2"/>
+        </a:solidFill>
+        <a:effectLst/>
+      </p:bgPr>
+    </p:bg>
     <p:spTree>
       <p:nvGrpSpPr>
         <p:cNvPr id="1" name=""/>
@@ -9928,30 +11203,99 @@
           <a:chExt cx="0" cy="0"/>
         </a:xfrm>
       </p:grpSpPr>
-      <p:pic>
-        <p:nvPicPr>
-          <p:cNvPr id="55" name="Google Shape;90;p19"/>
-          <p:cNvPicPr/>
+      <p:sp>
+        <p:nvSpPr>
+          <p:cNvPr id="9001" name="Bandeau vert"/>
+          <p:cNvSpPr/>
           <p:nvPr/>
-        </p:nvPicPr>
-        <p:blipFill>
-          <a:blip r:embed="rId1"/>
-          <a:stretch/>
-        </p:blipFill>
-        <p:spPr>
-          <a:xfrm>
-            <a:off x="0" y="0"/>
-            <a:ext cx="9143640" cy="5143320"/>
-          </a:xfrm>
-          <a:prstGeom prst="rect">
-            <a:avLst/>
-          </a:prstGeom>
-          <a:noFill/>
-          <a:ln w="0">
+        </p:nvSpPr>
+        <p:spPr>
+          <a:xfrm>
+            <a:off x="0" y="5019675"/>
+            <a:ext cx="4572000" cy="123825"/>
+          </a:xfrm>
+          <a:prstGeom prst="rect">
+            <a:avLst/>
+          </a:prstGeom>
+          <a:solidFill>
+            <a:srgbClr val="1F5E55"/>
+          </a:solidFill>
+          <a:ln>
             <a:noFill/>
           </a:ln>
         </p:spPr>
-      </p:pic>
+        <p:txBody>
+          <a:bodyPr/>
+          <a:lstStyle/>
+          <a:p>
+            <a:endParaRPr lang="fr-FR"/>
+          </a:p>
+        </p:txBody>
+      </p:sp>
+      <p:sp>
+        <p:nvSpPr>
+          <p:cNvPr id="9002" name="Bandeau rose"/>
+          <p:cNvSpPr/>
+          <p:nvPr/>
+        </p:nvSpPr>
+        <p:spPr>
+          <a:xfrm>
+            <a:off x="4572000" y="5019675"/>
+            <a:ext cx="4572000" cy="123825"/>
+          </a:xfrm>
+          <a:prstGeom prst="rect">
+            <a:avLst/>
+          </a:prstGeom>
+          <a:solidFill>
+            <a:srgbClr val="E94B78"/>
+          </a:solidFill>
+          <a:ln>
+            <a:noFill/>
+          </a:ln>
+        </p:spPr>
+        <p:txBody>
+          <a:bodyPr/>
+          <a:lstStyle/>
+          <a:p>
+            <a:endParaRPr lang="fr-FR"/>
+          </a:p>
+        </p:txBody>
+      </p:sp>
+      <p:sp>
+        <p:nvSpPr>
+          <p:cNvPr id="9003" name="Titre BARLO"/>
+          <p:cNvSpPr txBox="1"/>
+          <p:nvPr/>
+        </p:nvSpPr>
+        <p:spPr>
+          <a:xfrm>
+            <a:off x="304800" y="140000"/>
+            <a:ext cx="8534400" cy="310000"/>
+          </a:xfrm>
+          <a:prstGeom prst="rect">
+            <a:avLst/>
+          </a:prstGeom>
+          <a:noFill/>
+        </p:spPr>
+        <p:txBody>
+          <a:bodyPr wrap="none" lIns="0" tIns="0" rIns="0" bIns="0" anchor="ctr">
+            <a:noAutofit/>
+          </a:bodyPr>
+          <a:lstStyle/>
+          <a:p>
+            <a:r>
+              <a:rPr lang="fr-FR" sz="2000" b="1" dirty="0">
+                <a:solidFill>
+                  <a:srgbClr val="1F5E55"/>
+                </a:solidFill>
+                <a:latin typeface="Century Gothic" panose="020B0502020202020204" pitchFamily="34" charset="0"/>
+                <a:cs typeface="Century Gothic" panose="020B0502020202020204" pitchFamily="34" charset="0"/>
+              </a:rPr>
+              <a:t>SCÉNARIO A — LECTURE FINANCIÈRE ET TECHNIQUE</a:t>
+            </a:r>
+          </a:p>
+        </p:txBody>
+      </p:sp>
       <p:sp>
         <p:nvSpPr>
           <p:cNvPr id="56" name="Google Shape;91;p19"/>
@@ -10121,10 +11465,10 @@
   <p:cSld>
     <p:bg>
       <p:bgPr>
-        <a:blipFill rotWithShape="0">
-          <a:blip r:embed="rId1"/>
-          <a:stretch/>
-        </a:blipFill>
+        <a:solidFill>
+          <a:srgbClr val="F2F2F2"/>
+        </a:solidFill>
+        <a:effectLst/>
       </p:bgPr>
     </p:bg>
     <p:spTree>
@@ -10143,14 +11487,107 @@
       </p:grpSpPr>
       <p:sp>
         <p:nvSpPr>
+          <p:cNvPr id="9001" name="Bandeau vert"/>
+          <p:cNvSpPr/>
+          <p:nvPr/>
+        </p:nvSpPr>
+        <p:spPr>
+          <a:xfrm>
+            <a:off x="0" y="5019675"/>
+            <a:ext cx="4572000" cy="123825"/>
+          </a:xfrm>
+          <a:prstGeom prst="rect">
+            <a:avLst/>
+          </a:prstGeom>
+          <a:solidFill>
+            <a:srgbClr val="1F5E55"/>
+          </a:solidFill>
+          <a:ln>
+            <a:noFill/>
+          </a:ln>
+        </p:spPr>
+        <p:txBody>
+          <a:bodyPr/>
+          <a:lstStyle/>
+          <a:p>
+            <a:endParaRPr lang="fr-FR"/>
+          </a:p>
+        </p:txBody>
+      </p:sp>
+      <p:sp>
+        <p:nvSpPr>
+          <p:cNvPr id="9002" name="Bandeau rose"/>
+          <p:cNvSpPr/>
+          <p:nvPr/>
+        </p:nvSpPr>
+        <p:spPr>
+          <a:xfrm>
+            <a:off x="4572000" y="5019675"/>
+            <a:ext cx="4572000" cy="123825"/>
+          </a:xfrm>
+          <a:prstGeom prst="rect">
+            <a:avLst/>
+          </a:prstGeom>
+          <a:solidFill>
+            <a:srgbClr val="E94B78"/>
+          </a:solidFill>
+          <a:ln>
+            <a:noFill/>
+          </a:ln>
+        </p:spPr>
+        <p:txBody>
+          <a:bodyPr/>
+          <a:lstStyle/>
+          <a:p>
+            <a:endParaRPr lang="fr-FR"/>
+          </a:p>
+        </p:txBody>
+      </p:sp>
+      <p:sp>
+        <p:nvSpPr>
+          <p:cNvPr id="9003" name="Titre BARLO"/>
+          <p:cNvSpPr txBox="1"/>
+          <p:nvPr/>
+        </p:nvSpPr>
+        <p:spPr>
+          <a:xfrm>
+            <a:off x="304800" y="140000"/>
+            <a:ext cx="8534400" cy="310000"/>
+          </a:xfrm>
+          <a:prstGeom prst="rect">
+            <a:avLst/>
+          </a:prstGeom>
+          <a:noFill/>
+        </p:spPr>
+        <p:txBody>
+          <a:bodyPr wrap="none" lIns="0" tIns="0" rIns="0" bIns="0" anchor="ctr">
+            <a:noAutofit/>
+          </a:bodyPr>
+          <a:lstStyle/>
+          <a:p>
+            <a:r>
+              <a:rPr lang="fr-FR" sz="2000" b="1" dirty="0">
+                <a:solidFill>
+                  <a:srgbClr val="1F5E55"/>
+                </a:solidFill>
+                <a:latin typeface="Century Gothic" panose="020B0502020202020204" pitchFamily="34" charset="0"/>
+                <a:cs typeface="Century Gothic" panose="020B0502020202020204" pitchFamily="34" charset="0"/>
+              </a:rPr>
+              <a:t>SCÉNARIO A — EXPOSITION ET FRAGILITÉS</a:t>
+            </a:r>
+          </a:p>
+        </p:txBody>
+      </p:sp>
+      <p:sp>
+        <p:nvSpPr>
           <p:cNvPr id="57" name="Google Shape;96;p20"/>
           <p:cNvSpPr/>
           <p:nvPr/>
         </p:nvSpPr>
         <p:spPr>
           <a:xfrm>
-            <a:off x="0" y="487800"/>
-            <a:ext cx="9143640" cy="2831760"/>
+            <a:off x="0" y="502920"/>
+            <a:ext cx="9144000" cy="2148840"/>
           </a:xfrm>
           <a:prstGeom prst="rect">
             <a:avLst/>
@@ -10264,8 +11701,8 @@
         </p:nvSpPr>
         <p:spPr>
           <a:xfrm>
-            <a:off x="117000" y="3345120"/>
-            <a:ext cx="8953200" cy="1663560"/>
+            <a:off x="118872" y="2697480"/>
+            <a:ext cx="8951976" cy="2240280"/>
           </a:xfrm>
           <a:prstGeom prst="rect">
             <a:avLst/>
@@ -10381,6 +11818,14 @@
 <file path=ppt/slides/slide9.xml><?xml version="1.0" encoding="utf-8"?>
 <p:sld xmlns:a="http://schemas.openxmlformats.org/drawingml/2006/main" xmlns:p="http://schemas.openxmlformats.org/presentationml/2006/main" xmlns:r="http://schemas.openxmlformats.org/officeDocument/2006/relationships" xmlns:p14="http://schemas.microsoft.com/office/powerpoint/2010/main" xmlns:p15="http://schemas.microsoft.com/office/powerpoint/2012/main" xmlns:mc="http://schemas.openxmlformats.org/markup-compatibility/2006">
   <p:cSld>
+    <p:bg>
+      <p:bgPr>
+        <a:solidFill>
+          <a:srgbClr val="F2F2F2"/>
+        </a:solidFill>
+        <a:effectLst/>
+      </p:bgPr>
+    </p:bg>
     <p:spTree>
       <p:nvGrpSpPr>
         <p:cNvPr id="1" name=""/>
@@ -10395,30 +11840,99 @@
           <a:chExt cx="0" cy="0"/>
         </a:xfrm>
       </p:grpSpPr>
-      <p:pic>
-        <p:nvPicPr>
-          <p:cNvPr id="59" name="Google Shape;102;p21"/>
-          <p:cNvPicPr/>
+      <p:sp>
+        <p:nvSpPr>
+          <p:cNvPr id="9001" name="Bandeau vert"/>
+          <p:cNvSpPr/>
           <p:nvPr/>
-        </p:nvPicPr>
-        <p:blipFill>
-          <a:blip r:embed="rId1"/>
-          <a:stretch/>
-        </p:blipFill>
-        <p:spPr>
-          <a:xfrm>
-            <a:off x="0" y="0"/>
-            <a:ext cx="9143640" cy="5143320"/>
-          </a:xfrm>
-          <a:prstGeom prst="rect">
-            <a:avLst/>
-          </a:prstGeom>
-          <a:noFill/>
-          <a:ln w="0">
+        </p:nvSpPr>
+        <p:spPr>
+          <a:xfrm>
+            <a:off x="0" y="5019675"/>
+            <a:ext cx="4572000" cy="123825"/>
+          </a:xfrm>
+          <a:prstGeom prst="rect">
+            <a:avLst/>
+          </a:prstGeom>
+          <a:solidFill>
+            <a:srgbClr val="1F5E55"/>
+          </a:solidFill>
+          <a:ln>
             <a:noFill/>
           </a:ln>
         </p:spPr>
-      </p:pic>
+        <p:txBody>
+          <a:bodyPr/>
+          <a:lstStyle/>
+          <a:p>
+            <a:endParaRPr lang="fr-FR"/>
+          </a:p>
+        </p:txBody>
+      </p:sp>
+      <p:sp>
+        <p:nvSpPr>
+          <p:cNvPr id="9002" name="Bandeau rose"/>
+          <p:cNvSpPr/>
+          <p:nvPr/>
+        </p:nvSpPr>
+        <p:spPr>
+          <a:xfrm>
+            <a:off x="4572000" y="5019675"/>
+            <a:ext cx="4572000" cy="123825"/>
+          </a:xfrm>
+          <a:prstGeom prst="rect">
+            <a:avLst/>
+          </a:prstGeom>
+          <a:solidFill>
+            <a:srgbClr val="E94B78"/>
+          </a:solidFill>
+          <a:ln>
+            <a:noFill/>
+          </a:ln>
+        </p:spPr>
+        <p:txBody>
+          <a:bodyPr/>
+          <a:lstStyle/>
+          <a:p>
+            <a:endParaRPr lang="fr-FR"/>
+          </a:p>
+        </p:txBody>
+      </p:sp>
+      <p:sp>
+        <p:nvSpPr>
+          <p:cNvPr id="9003" name="Titre BARLO"/>
+          <p:cNvSpPr txBox="1"/>
+          <p:nvPr/>
+        </p:nvSpPr>
+        <p:spPr>
+          <a:xfrm>
+            <a:off x="304800" y="140000"/>
+            <a:ext cx="8534400" cy="310000"/>
+          </a:xfrm>
+          <a:prstGeom prst="rect">
+            <a:avLst/>
+          </a:prstGeom>
+          <a:noFill/>
+        </p:spPr>
+        <p:txBody>
+          <a:bodyPr wrap="none" lIns="0" tIns="0" rIns="0" bIns="0" anchor="ctr">
+            <a:noAutofit/>
+          </a:bodyPr>
+          <a:lstStyle/>
+          <a:p>
+            <a:r>
+              <a:rPr lang="fr-FR" sz="2000" b="1" dirty="0">
+                <a:solidFill>
+                  <a:srgbClr val="1F5E55"/>
+                </a:solidFill>
+                <a:latin typeface="Century Gothic" panose="020B0502020202020204" pitchFamily="34" charset="0"/>
+                <a:cs typeface="Century Gothic" panose="020B0502020202020204" pitchFamily="34" charset="0"/>
+              </a:rPr>
+              <a:t>SCÉNARIO B — VOLUMÉTRIE</a:t>
+            </a:r>
+          </a:p>
+        </p:txBody>
+      </p:sp>
       <p:sp>
         <p:nvSpPr>
           <p:cNvPr id="60" name="Google Shape;103;p21"/>
